--- a/examples/repositories/agent-slides-showcase/input/project/base_template.pptx
+++ b/examples/repositories/agent-slides-showcase/input/project/base_template.pptx
@@ -5,7 +5,7 @@
     <p:sldMasterId id="2147483648" r:id="rId1"/>
   </p:sldMasterIdLst>
   <p:sldIdLst/>
-  <p:sldSz cx="12191695" cy="6858000" type="screen4x3"/>
+  <p:sldSz cx="12192000" cy="6858000" type="screen4x3"/>
   <p:notesSz cx="6858000" cy="9144000"/>
   <p:defaultTextStyle>
     <a:defPPr>
@@ -107,7 +107,15 @@
 
 <file path=ppt/slideLayouts/slideLayout1.xml><?xml version="1.0" encoding="utf-8"?>
 <p:sldLayout xmlns:a="http://schemas.openxmlformats.org/drawingml/2006/main" xmlns:r="http://schemas.openxmlformats.org/officeDocument/2006/relationships" xmlns:p="http://schemas.openxmlformats.org/presentationml/2006/main" type="title" preserve="1">
-  <p:cSld name="Title Slide">
+  <p:cSld name="Workshop Cover">
+    <p:bg>
+      <p:bgPr>
+        <a:solidFill>
+          <a:srgbClr val="102D45"/>
+        </a:solidFill>
+        <a:effectLst/>
+      </p:bgPr>
+    </p:bg>
     <p:spTree>
       <p:nvGrpSpPr>
         <p:cNvPr id="1" name=""/>
@@ -124,213 +132,196 @@
       </p:grpSpPr>
       <p:sp>
         <p:nvSpPr>
-          <p:cNvPr id="2" name="Title 1"/>
-          <p:cNvSpPr>
-            <a:spLocks noGrp="1"/>
-          </p:cNvSpPr>
-          <p:nvPr>
-            <p:ph type="ctrTitle"/>
-          </p:nvPr>
+          <p:cNvPr id="4" name="Workshop Cover Band"/>
+          <p:cNvSpPr/>
+          <p:nvPr userDrawn="1"/>
         </p:nvSpPr>
         <p:spPr>
           <a:xfrm>
-            <a:off x="685800" y="2130425"/>
-            <a:ext cx="7772400" cy="1470025"/>
+            <a:off x="0" y="6492240"/>
+            <a:ext cx="12192000" cy="365760"/>
+          </a:xfrm>
+          <a:prstGeom prst="rect">
+            <a:avLst/>
+          </a:prstGeom>
+          <a:solidFill>
+            <a:srgbClr val="FF6A13"/>
+          </a:solidFill>
+          <a:ln>
+            <a:noFill/>
+          </a:ln>
+        </p:spPr>
+      </p:sp>
+      <p:sp>
+        <p:nvSpPr>
+          <p:cNvPr id="5" name="Workshop Cover Rule"/>
+          <p:cNvSpPr/>
+          <p:nvPr userDrawn="1"/>
+        </p:nvSpPr>
+        <p:spPr>
+          <a:xfrm>
+            <a:off x="5547208" y="4087368"/>
+            <a:ext cx="1097280" cy="64008"/>
+          </a:xfrm>
+          <a:prstGeom prst="rect">
+            <a:avLst/>
+          </a:prstGeom>
+          <a:solidFill>
+            <a:srgbClr val="FF6A13"/>
+          </a:solidFill>
+          <a:ln>
+            <a:noFill/>
+          </a:ln>
+        </p:spPr>
+      </p:sp>
+      <p:sp>
+        <p:nvSpPr>
+          <p:cNvPr id="6" name="Workshop Cover Label"/>
+          <p:cNvSpPr txBox="1"/>
+          <p:nvPr userDrawn="1"/>
+        </p:nvSpPr>
+        <p:spPr>
+          <a:xfrm>
+            <a:off x="2026768" y="566928"/>
+            <a:ext cx="8138160" cy="310896"/>
+          </a:xfrm>
+          <a:prstGeom prst="rect">
+            <a:avLst/>
+          </a:prstGeom>
+          <a:noFill/>
+        </p:spPr>
+        <p:txBody>
+          <a:bodyPr vert="horz" wrap="square" lIns="91440" tIns="45720" rIns="91440" bIns="45720" rtlCol="0" anchor="t">
+            <a:noAutofit/>
+          </a:bodyPr>
+          <a:lstStyle/>
+          <a:p>
+            <a:pPr algn="ctr"/>
+            <a:r>
+              <a:rPr lang="en-US" dirty="0" sz="1200" b="0">
+                <a:solidFill>
+                  <a:srgbClr val="D9E7F1"/>
+                </a:solidFill>
+                <a:latin typeface="Manrope"/>
+                <a:ea typeface="Zen Kaku Gothic New"/>
+                <a:cs typeface="Manrope"/>
+              </a:rPr>
+              <a:t>A DAY TO MAKE / CONCEPT PROPOSAL</a:t>
+            </a:r>
+          </a:p>
+        </p:txBody>
+      </p:sp>
+      <p:sp>
+        <p:nvSpPr>
+          <p:cNvPr id="2" name="Workshop Cover Title"/>
+          <p:cNvSpPr>
+            <a:spLocks noGrp="1"/>
+          </p:cNvSpPr>
+          <p:nvPr>
+            <p:ph type="ctrTitle" hasCustomPrompt="1"/>
+          </p:nvPr>
+        </p:nvSpPr>
+        <p:spPr>
+          <a:xfrm>
+            <a:off x="822960" y="2011680"/>
+            <a:ext cx="10545775" cy="1920240"/>
           </a:xfrm>
         </p:spPr>
         <p:txBody>
-          <a:bodyPr/>
-          <a:lstStyle/>
-          <a:p>
-            <a:r>
-              <a:rPr lang="en-US" smtClean="0"/>
-              <a:t>Click to edit Master title style</a:t>
-            </a:r>
-            <a:endParaRPr lang="en-US"/>
-          </a:p>
-        </p:txBody>
-      </p:sp>
-      <p:sp>
-        <p:nvSpPr>
-          <p:cNvPr id="3" name="Subtitle 2"/>
-          <p:cNvSpPr>
-            <a:spLocks noGrp="1"/>
-          </p:cNvSpPr>
-          <p:nvPr>
-            <p:ph type="subTitle" idx="1"/>
+          <a:bodyPr vert="horz" wrap="square" lIns="91440" tIns="45720" rIns="91440" bIns="45720" rtlCol="0" anchor="b">
+            <a:noAutofit/>
+          </a:bodyPr>
+          <a:lstStyle>
+            <a:lvl1pPr marL="0" indent="0" algn="ctr">
+              <a:lnSpc>
+                <a:spcPct val="100000"/>
+              </a:lnSpc>
+              <a:spcBef>
+                <a:spcPts val="0"/>
+              </a:spcBef>
+              <a:buNone/>
+              <a:defRPr sz="4800" b="1">
+                <a:solidFill>
+                  <a:srgbClr val="FFFFFF"/>
+                </a:solidFill>
+                <a:latin typeface="Zen Kaku Gothic New"/>
+                <a:ea typeface="Zen Kaku Gothic New"/>
+                <a:cs typeface="Zen Kaku Gothic New"/>
+              </a:defRPr>
+            </a:lvl1pPr>
+          </a:lstStyle>
+          <a:p>
+            <a:pPr>
+              <a:defRPr sz="4800" b="1">
+                <a:solidFill>
+                  <a:srgbClr val="FFFFFF"/>
+                </a:solidFill>
+                <a:latin typeface="Zen Kaku Gothic New"/>
+                <a:ea typeface="Zen Kaku Gothic New"/>
+                <a:cs typeface="Zen Kaku Gothic New"/>
+              </a:defRPr>
+            </a:pPr>
+            <a:r>
+              <a:rPr lang="ja-JP" altLang="en-US"/>
+              <a:t>表紙の見出しを入力</a:t>
+            </a:r>
+          </a:p>
+        </p:txBody>
+      </p:sp>
+      <p:sp>
+        <p:nvSpPr>
+          <p:cNvPr id="3" name="Workshop Cover Subtitle"/>
+          <p:cNvSpPr>
+            <a:spLocks noGrp="1"/>
+          </p:cNvSpPr>
+          <p:nvPr>
+            <p:ph type="subTitle" idx="1" hasCustomPrompt="1"/>
           </p:nvPr>
         </p:nvSpPr>
         <p:spPr>
           <a:xfrm>
-            <a:off x="1371600" y="3886200"/>
-            <a:ext cx="6400800" cy="1752600"/>
+            <a:off x="1524305" y="4343400"/>
+            <a:ext cx="9144000" cy="914400"/>
           </a:xfrm>
         </p:spPr>
         <p:txBody>
-          <a:bodyPr/>
+          <a:bodyPr vert="horz" wrap="square" lIns="91440" tIns="45720" rIns="91440" bIns="45720" rtlCol="0" anchor="t">
+            <a:normAutofit/>
+          </a:bodyPr>
           <a:lstStyle>
             <a:lvl1pPr marL="0" indent="0" algn="ctr">
-              <a:buNone/>
-              <a:defRPr>
+              <a:lnSpc>
+                <a:spcPct val="100000"/>
+              </a:lnSpc>
+              <a:spcBef>
+                <a:spcPts val="0"/>
+              </a:spcBef>
+              <a:buNone/>
+              <a:defRPr sz="2000" b="0">
                 <a:solidFill>
-                  <a:schemeClr val="tx1">
-                    <a:tint val="75000"/>
-                  </a:schemeClr>
+                  <a:srgbClr val="D9E7F1"/>
                 </a:solidFill>
+                <a:latin typeface="Zen Kaku Gothic New"/>
+                <a:ea typeface="Zen Kaku Gothic New"/>
+                <a:cs typeface="Zen Kaku Gothic New"/>
               </a:defRPr>
             </a:lvl1pPr>
-            <a:lvl2pPr marL="457200" indent="0" algn="ctr">
-              <a:buNone/>
-              <a:defRPr>
+          </a:lstStyle>
+          <a:p>
+            <a:pPr>
+              <a:defRPr sz="2000" b="0">
                 <a:solidFill>
-                  <a:schemeClr val="tx1">
-                    <a:tint val="75000"/>
-                  </a:schemeClr>
+                  <a:srgbClr val="D9E7F1"/>
                 </a:solidFill>
+                <a:latin typeface="Zen Kaku Gothic New"/>
+                <a:ea typeface="Zen Kaku Gothic New"/>
+                <a:cs typeface="Zen Kaku Gothic New"/>
               </a:defRPr>
-            </a:lvl2pPr>
-            <a:lvl3pPr marL="914400" indent="0" algn="ctr">
-              <a:buNone/>
-              <a:defRPr>
-                <a:solidFill>
-                  <a:schemeClr val="tx1">
-                    <a:tint val="75000"/>
-                  </a:schemeClr>
-                </a:solidFill>
-              </a:defRPr>
-            </a:lvl3pPr>
-            <a:lvl4pPr marL="1371600" indent="0" algn="ctr">
-              <a:buNone/>
-              <a:defRPr>
-                <a:solidFill>
-                  <a:schemeClr val="tx1">
-                    <a:tint val="75000"/>
-                  </a:schemeClr>
-                </a:solidFill>
-              </a:defRPr>
-            </a:lvl4pPr>
-            <a:lvl5pPr marL="1828800" indent="0" algn="ctr">
-              <a:buNone/>
-              <a:defRPr>
-                <a:solidFill>
-                  <a:schemeClr val="tx1">
-                    <a:tint val="75000"/>
-                  </a:schemeClr>
-                </a:solidFill>
-              </a:defRPr>
-            </a:lvl5pPr>
-            <a:lvl6pPr marL="2286000" indent="0" algn="ctr">
-              <a:buNone/>
-              <a:defRPr>
-                <a:solidFill>
-                  <a:schemeClr val="tx1">
-                    <a:tint val="75000"/>
-                  </a:schemeClr>
-                </a:solidFill>
-              </a:defRPr>
-            </a:lvl6pPr>
-            <a:lvl7pPr marL="2743200" indent="0" algn="ctr">
-              <a:buNone/>
-              <a:defRPr>
-                <a:solidFill>
-                  <a:schemeClr val="tx1">
-                    <a:tint val="75000"/>
-                  </a:schemeClr>
-                </a:solidFill>
-              </a:defRPr>
-            </a:lvl7pPr>
-            <a:lvl8pPr marL="3200400" indent="0" algn="ctr">
-              <a:buNone/>
-              <a:defRPr>
-                <a:solidFill>
-                  <a:schemeClr val="tx1">
-                    <a:tint val="75000"/>
-                  </a:schemeClr>
-                </a:solidFill>
-              </a:defRPr>
-            </a:lvl8pPr>
-            <a:lvl9pPr marL="3657600" indent="0" algn="ctr">
-              <a:buNone/>
-              <a:defRPr>
-                <a:solidFill>
-                  <a:schemeClr val="tx1">
-                    <a:tint val="75000"/>
-                  </a:schemeClr>
-                </a:solidFill>
-              </a:defRPr>
-            </a:lvl9pPr>
-          </a:lstStyle>
-          <a:p>
-            <a:r>
-              <a:rPr lang="en-US" smtClean="0"/>
-              <a:t>Click to edit Master subtitle style</a:t>
-            </a:r>
-            <a:endParaRPr lang="en-US"/>
-          </a:p>
-        </p:txBody>
-      </p:sp>
-      <p:sp>
-        <p:nvSpPr>
-          <p:cNvPr id="4" name="Date Placeholder 3"/>
-          <p:cNvSpPr>
-            <a:spLocks noGrp="1"/>
-          </p:cNvSpPr>
-          <p:nvPr>
-            <p:ph type="dt" sz="half" idx="10"/>
-          </p:nvPr>
-        </p:nvSpPr>
-        <p:spPr/>
-        <p:txBody>
-          <a:bodyPr/>
-          <a:lstStyle/>
-          <a:p>
-            <a:fld id="{5BCAD085-E8A6-8845-BD4E-CB4CCA059FC4}" type="datetimeFigureOut">
-              <a:rPr lang="en-US" smtClean="0"/>
-              <a:t>1/27/13</a:t>
-            </a:fld>
-            <a:endParaRPr lang="en-US"/>
-          </a:p>
-        </p:txBody>
-      </p:sp>
-      <p:sp>
-        <p:nvSpPr>
-          <p:cNvPr id="5" name="Footer Placeholder 4"/>
-          <p:cNvSpPr>
-            <a:spLocks noGrp="1"/>
-          </p:cNvSpPr>
-          <p:nvPr>
-            <p:ph type="ftr" sz="quarter" idx="11"/>
-          </p:nvPr>
-        </p:nvSpPr>
-        <p:spPr/>
-        <p:txBody>
-          <a:bodyPr/>
-          <a:lstStyle/>
-          <a:p>
-            <a:endParaRPr lang="en-US"/>
-          </a:p>
-        </p:txBody>
-      </p:sp>
-      <p:sp>
-        <p:nvSpPr>
-          <p:cNvPr id="6" name="Slide Number Placeholder 5"/>
-          <p:cNvSpPr>
-            <a:spLocks noGrp="1"/>
-          </p:cNvSpPr>
-          <p:nvPr>
-            <p:ph type="sldNum" sz="quarter" idx="12"/>
-          </p:nvPr>
-        </p:nvSpPr>
-        <p:spPr/>
-        <p:txBody>
-          <a:bodyPr/>
-          <a:lstStyle/>
-          <a:p>
-            <a:fld id="{C1FF6DA9-008F-8B48-92A6-B652298478BF}" type="slidenum">
-              <a:rPr lang="en-US" smtClean="0"/>
-              <a:t>‹#›</a:t>
-            </a:fld>
-            <a:endParaRPr lang="en-US"/>
+            </a:pPr>
+            <a:r>
+              <a:rPr lang="ja-JP" altLang="en-US"/>
+              <a:t>補足の一文を入力</a:t>
+            </a:r>
           </a:p>
         </p:txBody>
       </p:sp>
@@ -546,8 +537,8 @@
         </p:nvSpPr>
         <p:spPr>
           <a:xfrm>
-            <a:off x="6629400" y="274638"/>
-            <a:ext cx="2057400" cy="5851525"/>
+            <a:off x="8839200" y="274638"/>
+            <a:ext cx="2743200" cy="5851525"/>
           </a:xfrm>
         </p:spPr>
         <p:txBody>
@@ -574,8 +565,8 @@
         </p:nvSpPr>
         <p:spPr>
           <a:xfrm>
-            <a:off x="457200" y="274638"/>
-            <a:ext cx="6019800" cy="5851525"/>
+            <a:off x="609600" y="274638"/>
+            <a:ext cx="8026400" cy="5851525"/>
           </a:xfrm>
         </p:spPr>
         <p:txBody>
@@ -699,7 +690,15 @@
 
 <file path=ppt/slideLayouts/slideLayout2.xml><?xml version="1.0" encoding="utf-8"?>
 <p:sldLayout xmlns:a="http://schemas.openxmlformats.org/drawingml/2006/main" xmlns:r="http://schemas.openxmlformats.org/officeDocument/2006/relationships" xmlns:p="http://schemas.openxmlformats.org/presentationml/2006/main" type="obj" preserve="1">
-  <p:cSld name="Title and Content">
+  <p:cSld name="Workshop Split">
+    <p:bg>
+      <p:bgPr>
+        <a:solidFill>
+          <a:srgbClr val="102D45"/>
+        </a:solidFill>
+        <a:effectLst/>
+      </p:bgPr>
+    </p:bg>
     <p:spTree>
       <p:nvGrpSpPr>
         <p:cNvPr id="1" name=""/>
@@ -716,141 +715,242 @@
       </p:grpSpPr>
       <p:sp>
         <p:nvSpPr>
-          <p:cNvPr id="2" name="Title 1"/>
-          <p:cNvSpPr>
-            <a:spLocks noGrp="1"/>
-          </p:cNvSpPr>
-          <p:nvPr>
-            <p:ph type="title"/>
-          </p:nvPr>
-        </p:nvSpPr>
-        <p:spPr/>
-        <p:txBody>
-          <a:bodyPr/>
-          <a:lstStyle/>
-          <a:p>
-            <a:r>
-              <a:rPr lang="en-US" smtClean="0"/>
-              <a:t>Click to edit Master title style</a:t>
-            </a:r>
-            <a:endParaRPr lang="en-US"/>
-          </a:p>
-        </p:txBody>
-      </p:sp>
-      <p:sp>
-        <p:nvSpPr>
-          <p:cNvPr id="3" name="Content Placeholder 2"/>
-          <p:cNvSpPr>
-            <a:spLocks noGrp="1"/>
-          </p:cNvSpPr>
-          <p:nvPr>
-            <p:ph idx="1"/>
-          </p:nvPr>
-        </p:nvSpPr>
-        <p:spPr/>
-        <p:txBody>
-          <a:bodyPr/>
-          <a:lstStyle/>
-          <a:p>
-            <a:pPr lvl="0"/>
-            <a:r>
-              <a:rPr lang="en-US" smtClean="0"/>
-              <a:t>Click to edit Master text styles</a:t>
-            </a:r>
-          </a:p>
-          <a:p>
-            <a:pPr lvl="1"/>
-            <a:r>
-              <a:rPr lang="en-US" smtClean="0"/>
-              <a:t>Second level</a:t>
-            </a:r>
-          </a:p>
-          <a:p>
-            <a:pPr lvl="2"/>
-            <a:r>
-              <a:rPr lang="en-US" smtClean="0"/>
-              <a:t>Third level</a:t>
-            </a:r>
-          </a:p>
-          <a:p>
-            <a:pPr lvl="3"/>
-            <a:r>
-              <a:rPr lang="en-US" smtClean="0"/>
-              <a:t>Fourth level</a:t>
-            </a:r>
-          </a:p>
-          <a:p>
-            <a:pPr lvl="4"/>
-            <a:r>
-              <a:rPr lang="en-US" smtClean="0"/>
-              <a:t>Fifth level</a:t>
-            </a:r>
-            <a:endParaRPr lang="en-US"/>
-          </a:p>
-        </p:txBody>
-      </p:sp>
-      <p:sp>
-        <p:nvSpPr>
-          <p:cNvPr id="4" name="Date Placeholder 3"/>
-          <p:cNvSpPr>
-            <a:spLocks noGrp="1"/>
-          </p:cNvSpPr>
-          <p:nvPr>
-            <p:ph type="dt" sz="half" idx="10"/>
-          </p:nvPr>
-        </p:nvSpPr>
-        <p:spPr/>
-        <p:txBody>
-          <a:bodyPr/>
-          <a:lstStyle/>
-          <a:p>
-            <a:fld id="{5BCAD085-E8A6-8845-BD4E-CB4CCA059FC4}" type="datetimeFigureOut">
-              <a:rPr lang="en-US" smtClean="0"/>
-              <a:t>1/27/13</a:t>
-            </a:fld>
-            <a:endParaRPr lang="en-US"/>
-          </a:p>
-        </p:txBody>
-      </p:sp>
-      <p:sp>
-        <p:nvSpPr>
-          <p:cNvPr id="5" name="Footer Placeholder 4"/>
-          <p:cNvSpPr>
-            <a:spLocks noGrp="1"/>
-          </p:cNvSpPr>
-          <p:nvPr>
-            <p:ph type="ftr" sz="quarter" idx="11"/>
-          </p:nvPr>
-        </p:nvSpPr>
-        <p:spPr/>
-        <p:txBody>
-          <a:bodyPr/>
-          <a:lstStyle/>
-          <a:p>
-            <a:endParaRPr lang="en-US"/>
-          </a:p>
-        </p:txBody>
-      </p:sp>
-      <p:sp>
-        <p:nvSpPr>
-          <p:cNvPr id="6" name="Slide Number Placeholder 5"/>
-          <p:cNvSpPr>
-            <a:spLocks noGrp="1"/>
-          </p:cNvSpPr>
-          <p:nvPr>
-            <p:ph type="sldNum" sz="quarter" idx="12"/>
-          </p:nvPr>
-        </p:nvSpPr>
-        <p:spPr/>
-        <p:txBody>
-          <a:bodyPr/>
-          <a:lstStyle/>
-          <a:p>
-            <a:fld id="{C1FF6DA9-008F-8B48-92A6-B652298478BF}" type="slidenum">
-              <a:rPr lang="en-US" smtClean="0"/>
-              <a:t>‹#›</a:t>
-            </a:fld>
-            <a:endParaRPr lang="en-US"/>
+          <p:cNvPr id="4" name="Workshop Side Panel"/>
+          <p:cNvSpPr/>
+          <p:nvPr userDrawn="1"/>
+        </p:nvSpPr>
+        <p:spPr>
+          <a:xfrm>
+            <a:off x="9162288" y="0"/>
+            <a:ext cx="3029712" cy="6858000"/>
+          </a:xfrm>
+          <a:prstGeom prst="rect">
+            <a:avLst/>
+          </a:prstGeom>
+          <a:solidFill>
+            <a:srgbClr val="FF6A13"/>
+          </a:solidFill>
+          <a:ln>
+            <a:noFill/>
+          </a:ln>
+        </p:spPr>
+      </p:sp>
+      <p:sp>
+        <p:nvSpPr>
+          <p:cNvPr id="5" name="Workshop Label"/>
+          <p:cNvSpPr txBox="1"/>
+          <p:nvPr userDrawn="1"/>
+        </p:nvSpPr>
+        <p:spPr>
+          <a:xfrm>
+            <a:off x="566928" y="301752"/>
+            <a:ext cx="8138160" cy="310896"/>
+          </a:xfrm>
+          <a:prstGeom prst="rect">
+            <a:avLst/>
+          </a:prstGeom>
+          <a:noFill/>
+        </p:spPr>
+        <p:txBody>
+          <a:bodyPr vert="horz" wrap="square" lIns="91440" tIns="45720" rIns="91440" bIns="45720" rtlCol="0" anchor="t">
+            <a:noAutofit/>
+          </a:bodyPr>
+          <a:lstStyle/>
+          <a:p>
+            <a:pPr algn="l"/>
+            <a:r>
+              <a:rPr lang="en-US" dirty="0" sz="1200" b="0">
+                <a:solidFill>
+                  <a:srgbClr val="D9E7F1"/>
+                </a:solidFill>
+                <a:latin typeface="Manrope"/>
+                <a:ea typeface="Zen Kaku Gothic New"/>
+                <a:cs typeface="Manrope"/>
+              </a:rPr>
+              <a:t>A DAY TO MAKE / CONCEPT PROPOSAL</a:t>
+            </a:r>
+          </a:p>
+        </p:txBody>
+      </p:sp>
+      <p:sp>
+        <p:nvSpPr>
+          <p:cNvPr id="2" name="Workshop Title"/>
+          <p:cNvSpPr>
+            <a:spLocks noGrp="1"/>
+          </p:cNvSpPr>
+          <p:nvPr>
+            <p:ph type="title" hasCustomPrompt="1"/>
+          </p:nvPr>
+        </p:nvSpPr>
+        <p:spPr>
+          <a:xfrm>
+            <a:off x="530352" y="822960"/>
+            <a:ext cx="8321040" cy="2084832"/>
+          </a:xfrm>
+        </p:spPr>
+        <p:txBody>
+          <a:bodyPr vert="horz" wrap="square" lIns="91440" tIns="45720" rIns="91440" bIns="45720" rtlCol="0" anchor="t">
+            <a:noAutofit/>
+          </a:bodyPr>
+          <a:lstStyle>
+            <a:lvl1pPr marL="0" indent="0" algn="l">
+              <a:lnSpc>
+                <a:spcPct val="100000"/>
+              </a:lnSpc>
+              <a:spcBef>
+                <a:spcPts val="0"/>
+              </a:spcBef>
+              <a:buNone/>
+              <a:defRPr sz="5200" b="1">
+                <a:solidFill>
+                  <a:srgbClr val="FFFFFF"/>
+                </a:solidFill>
+                <a:latin typeface="Zen Kaku Gothic New"/>
+                <a:ea typeface="Zen Kaku Gothic New"/>
+                <a:cs typeface="Zen Kaku Gothic New"/>
+              </a:defRPr>
+            </a:lvl1pPr>
+          </a:lstStyle>
+          <a:p>
+            <a:pPr>
+              <a:defRPr sz="5200" b="1">
+                <a:solidFill>
+                  <a:srgbClr val="FFFFFF"/>
+                </a:solidFill>
+                <a:latin typeface="Zen Kaku Gothic New"/>
+                <a:ea typeface="Zen Kaku Gothic New"/>
+                <a:cs typeface="Zen Kaku Gothic New"/>
+              </a:defRPr>
+            </a:pPr>
+            <a:r>
+              <a:rPr lang="ja-JP" altLang="en-US"/>
+              <a:t>見出しを入力</a:t>
+            </a:r>
+          </a:p>
+        </p:txBody>
+      </p:sp>
+      <p:sp>
+        <p:nvSpPr>
+          <p:cNvPr id="3" name="Workshop Body"/>
+          <p:cNvSpPr>
+            <a:spLocks noGrp="1"/>
+          </p:cNvSpPr>
+          <p:nvPr>
+            <p:ph idx="1" type="body" hasCustomPrompt="1"/>
+          </p:nvPr>
+        </p:nvSpPr>
+        <p:spPr>
+          <a:xfrm>
+            <a:off x="594360" y="3063240"/>
+            <a:ext cx="7973568" cy="868680"/>
+          </a:xfrm>
+        </p:spPr>
+        <p:txBody>
+          <a:bodyPr vert="horz" wrap="square" lIns="91440" tIns="45720" rIns="91440" bIns="45720" rtlCol="0" anchor="t">
+            <a:normAutofit/>
+          </a:bodyPr>
+          <a:lstStyle>
+            <a:lvl1pPr marL="0" indent="0" algn="l">
+              <a:lnSpc>
+                <a:spcPct val="100000"/>
+              </a:lnSpc>
+              <a:spcBef>
+                <a:spcPts val="0"/>
+              </a:spcBef>
+              <a:buNone/>
+              <a:defRPr sz="2300" b="0">
+                <a:solidFill>
+                  <a:srgbClr val="FFFFFF"/>
+                </a:solidFill>
+                <a:latin typeface="Zen Kaku Gothic New"/>
+                <a:ea typeface="Zen Kaku Gothic New"/>
+                <a:cs typeface="Zen Kaku Gothic New"/>
+              </a:defRPr>
+            </a:lvl1pPr>
+            <a:lvl2pPr marL="274320" indent="0" algn="l">
+              <a:lnSpc>
+                <a:spcPct val="100000"/>
+              </a:lnSpc>
+              <a:spcBef>
+                <a:spcPts val="0"/>
+              </a:spcBef>
+              <a:buNone/>
+              <a:defRPr sz="2300" b="0">
+                <a:solidFill>
+                  <a:srgbClr val="FFFFFF"/>
+                </a:solidFill>
+                <a:latin typeface="Zen Kaku Gothic New"/>
+                <a:ea typeface="Zen Kaku Gothic New"/>
+                <a:cs typeface="Zen Kaku Gothic New"/>
+              </a:defRPr>
+            </a:lvl2pPr>
+            <a:lvl3pPr marL="548640" indent="0" algn="l">
+              <a:lnSpc>
+                <a:spcPct val="100000"/>
+              </a:lnSpc>
+              <a:spcBef>
+                <a:spcPts val="0"/>
+              </a:spcBef>
+              <a:buNone/>
+              <a:defRPr sz="2300" b="0">
+                <a:solidFill>
+                  <a:srgbClr val="FFFFFF"/>
+                </a:solidFill>
+                <a:latin typeface="Zen Kaku Gothic New"/>
+                <a:ea typeface="Zen Kaku Gothic New"/>
+                <a:cs typeface="Zen Kaku Gothic New"/>
+              </a:defRPr>
+            </a:lvl3pPr>
+            <a:lvl4pPr marL="822960" indent="0" algn="l">
+              <a:lnSpc>
+                <a:spcPct val="100000"/>
+              </a:lnSpc>
+              <a:spcBef>
+                <a:spcPts val="0"/>
+              </a:spcBef>
+              <a:buNone/>
+              <a:defRPr sz="2300" b="0">
+                <a:solidFill>
+                  <a:srgbClr val="FFFFFF"/>
+                </a:solidFill>
+                <a:latin typeface="Zen Kaku Gothic New"/>
+                <a:ea typeface="Zen Kaku Gothic New"/>
+                <a:cs typeface="Zen Kaku Gothic New"/>
+              </a:defRPr>
+            </a:lvl4pPr>
+            <a:lvl5pPr marL="1097280" indent="0" algn="l">
+              <a:lnSpc>
+                <a:spcPct val="100000"/>
+              </a:lnSpc>
+              <a:spcBef>
+                <a:spcPts val="0"/>
+              </a:spcBef>
+              <a:buNone/>
+              <a:defRPr sz="2300" b="0">
+                <a:solidFill>
+                  <a:srgbClr val="FFFFFF"/>
+                </a:solidFill>
+                <a:latin typeface="Zen Kaku Gothic New"/>
+                <a:ea typeface="Zen Kaku Gothic New"/>
+                <a:cs typeface="Zen Kaku Gothic New"/>
+              </a:defRPr>
+            </a:lvl5pPr>
+          </a:lstStyle>
+          <a:p>
+            <a:pPr>
+              <a:defRPr sz="2300" b="0">
+                <a:solidFill>
+                  <a:srgbClr val="FFFFFF"/>
+                </a:solidFill>
+                <a:latin typeface="Zen Kaku Gothic New"/>
+                <a:ea typeface="Zen Kaku Gothic New"/>
+                <a:cs typeface="Zen Kaku Gothic New"/>
+              </a:defRPr>
+            </a:pPr>
+            <a:r>
+              <a:rPr lang="ja-JP" altLang="en-US"/>
+              <a:t>本文を入力</a:t>
+            </a:r>
           </a:p>
         </p:txBody>
       </p:sp>
@@ -896,8 +996,8 @@
         </p:nvSpPr>
         <p:spPr>
           <a:xfrm>
-            <a:off x="722313" y="4406900"/>
-            <a:ext cx="7772400" cy="1362075"/>
+            <a:off x="963084" y="4406900"/>
+            <a:ext cx="10363200" cy="1362075"/>
           </a:xfrm>
         </p:spPr>
         <p:txBody>
@@ -928,8 +1028,8 @@
         </p:nvSpPr>
         <p:spPr>
           <a:xfrm>
-            <a:off x="722313" y="2906713"/>
-            <a:ext cx="7772400" cy="1500187"/>
+            <a:off x="963084" y="2906713"/>
+            <a:ext cx="10363200" cy="1500187"/>
           </a:xfrm>
         </p:spPr>
         <p:txBody>
@@ -1165,8 +1265,8 @@
         </p:nvSpPr>
         <p:spPr>
           <a:xfrm>
-            <a:off x="457200" y="1600200"/>
-            <a:ext cx="4038600" cy="4525963"/>
+            <a:off x="609600" y="1600200"/>
+            <a:ext cx="5384800" cy="4525963"/>
           </a:xfrm>
         </p:spPr>
         <p:txBody>
@@ -1250,8 +1350,8 @@
         </p:nvSpPr>
         <p:spPr>
           <a:xfrm>
-            <a:off x="4648200" y="1600200"/>
-            <a:ext cx="4038600" cy="4525963"/>
+            <a:off x="6197600" y="1600200"/>
+            <a:ext cx="5384800" cy="4525963"/>
           </a:xfrm>
         </p:spPr>
         <p:txBody>
@@ -1457,8 +1557,8 @@
         </p:nvSpPr>
         <p:spPr>
           <a:xfrm>
-            <a:off x="457200" y="1535113"/>
-            <a:ext cx="4040188" cy="639762"/>
+            <a:off x="609600" y="1535113"/>
+            <a:ext cx="5386917" cy="639762"/>
           </a:xfrm>
         </p:spPr>
         <p:txBody>
@@ -1522,8 +1622,8 @@
         </p:nvSpPr>
         <p:spPr>
           <a:xfrm>
-            <a:off x="457200" y="2174875"/>
-            <a:ext cx="4040188" cy="3951288"/>
+            <a:off x="609600" y="2174875"/>
+            <a:ext cx="5386917" cy="3951288"/>
           </a:xfrm>
         </p:spPr>
         <p:txBody>
@@ -1607,8 +1707,8 @@
         </p:nvSpPr>
         <p:spPr>
           <a:xfrm>
-            <a:off x="4645025" y="1535113"/>
-            <a:ext cx="4041775" cy="639762"/>
+            <a:off x="6193367" y="1535113"/>
+            <a:ext cx="5389033" cy="639762"/>
           </a:xfrm>
         </p:spPr>
         <p:txBody>
@@ -1672,8 +1772,8 @@
         </p:nvSpPr>
         <p:spPr>
           <a:xfrm>
-            <a:off x="4645025" y="2174875"/>
-            <a:ext cx="4041775" cy="3951288"/>
+            <a:off x="6193367" y="2174875"/>
+            <a:ext cx="5389033" cy="3951288"/>
           </a:xfrm>
         </p:spPr>
         <p:txBody>
@@ -2065,8 +2165,8 @@
         </p:nvSpPr>
         <p:spPr>
           <a:xfrm>
-            <a:off x="457200" y="273050"/>
-            <a:ext cx="3008313" cy="1162050"/>
+            <a:off x="609600" y="273050"/>
+            <a:ext cx="4011084" cy="1162050"/>
           </a:xfrm>
         </p:spPr>
         <p:txBody>
@@ -2097,8 +2197,8 @@
         </p:nvSpPr>
         <p:spPr>
           <a:xfrm>
-            <a:off x="3575050" y="273050"/>
-            <a:ext cx="5111750" cy="5853113"/>
+            <a:off x="4766733" y="273050"/>
+            <a:ext cx="6815667" cy="5853113"/>
           </a:xfrm>
         </p:spPr>
         <p:txBody>
@@ -2182,8 +2282,8 @@
         </p:nvSpPr>
         <p:spPr>
           <a:xfrm>
-            <a:off x="457200" y="1435100"/>
-            <a:ext cx="3008313" cy="4691063"/>
+            <a:off x="609600" y="1435100"/>
+            <a:ext cx="4011084" cy="4691063"/>
           </a:xfrm>
         </p:spPr>
         <p:txBody>
@@ -2342,8 +2442,8 @@
         </p:nvSpPr>
         <p:spPr>
           <a:xfrm>
-            <a:off x="1792288" y="4800600"/>
-            <a:ext cx="5486400" cy="566738"/>
+            <a:off x="2389717" y="4800600"/>
+            <a:ext cx="7315200" cy="566738"/>
           </a:xfrm>
         </p:spPr>
         <p:txBody>
@@ -2374,8 +2474,8 @@
         </p:nvSpPr>
         <p:spPr>
           <a:xfrm>
-            <a:off x="1792288" y="612775"/>
-            <a:ext cx="5486400" cy="4114800"/>
+            <a:off x="2389717" y="612775"/>
+            <a:ext cx="7315200" cy="4114800"/>
           </a:xfrm>
         </p:spPr>
         <p:txBody>
@@ -2435,8 +2535,8 @@
         </p:nvSpPr>
         <p:spPr>
           <a:xfrm>
-            <a:off x="1792288" y="5367338"/>
-            <a:ext cx="5486400" cy="804862"/>
+            <a:off x="2389717" y="5367338"/>
+            <a:ext cx="7315200" cy="804862"/>
           </a:xfrm>
         </p:spPr>
         <p:txBody>
@@ -2600,8 +2700,8 @@
         </p:nvSpPr>
         <p:spPr>
           <a:xfrm>
-            <a:off x="457200" y="274638"/>
-            <a:ext cx="8229600" cy="1143000"/>
+            <a:off x="609600" y="274638"/>
+            <a:ext cx="10972800" cy="1143000"/>
           </a:xfrm>
           <a:prstGeom prst="rect">
             <a:avLst/>
@@ -2633,8 +2733,8 @@
         </p:nvSpPr>
         <p:spPr>
           <a:xfrm>
-            <a:off x="457200" y="1600200"/>
-            <a:ext cx="8229600" cy="4525963"/>
+            <a:off x="609600" y="1600200"/>
+            <a:ext cx="10972800" cy="4525963"/>
           </a:xfrm>
           <a:prstGeom prst="rect">
             <a:avLst/>
@@ -2695,8 +2795,8 @@
         </p:nvSpPr>
         <p:spPr>
           <a:xfrm>
-            <a:off x="457200" y="6356350"/>
-            <a:ext cx="2133600" cy="365125"/>
+            <a:off x="609600" y="6356350"/>
+            <a:ext cx="2844800" cy="365125"/>
           </a:xfrm>
           <a:prstGeom prst="rect">
             <a:avLst/>
@@ -2736,8 +2836,8 @@
         </p:nvSpPr>
         <p:spPr>
           <a:xfrm>
-            <a:off x="3124200" y="6356350"/>
-            <a:ext cx="2895600" cy="365125"/>
+            <a:off x="4165600" y="6356350"/>
+            <a:ext cx="3860800" cy="365125"/>
           </a:xfrm>
           <a:prstGeom prst="rect">
             <a:avLst/>
@@ -2773,8 +2873,8 @@
         </p:nvSpPr>
         <p:spPr>
           <a:xfrm>
-            <a:off x="6553200" y="6356350"/>
-            <a:ext cx="2133600" cy="365125"/>
+            <a:off x="8737600" y="6356350"/>
+            <a:ext cx="2844800" cy="365125"/>
           </a:xfrm>
           <a:prstGeom prst="rect">
             <a:avLst/>
@@ -3077,14 +3177,14 @@
 </file>
 
 <file path=ppt/theme/theme1.xml><?xml version="1.0" encoding="utf-8"?>
-<a:theme xmlns:a="http://schemas.openxmlformats.org/drawingml/2006/main" name="Office Theme">
+<a:theme xmlns:a="http://schemas.openxmlformats.org/drawingml/2006/main" name="Workshop Theme">
   <a:themeElements>
-    <a:clrScheme name="Office">
+    <a:clrScheme name="Workshop Palette">
       <a:dk1>
-        <a:sysClr val="windowText" lastClr="000000"/>
+        <a:srgbClr val="102D45"/>
       </a:dk1>
       <a:lt1>
-        <a:sysClr val="window" lastClr="FFFFFF"/>
+        <a:srgbClr val="FFFFFF"/>
       </a:lt1>
       <a:dk2>
         <a:srgbClr val="1F497D"/>
@@ -3093,7 +3193,7 @@
         <a:srgbClr val="EEECE1"/>
       </a:lt2>
       <a:accent1>
-        <a:srgbClr val="4F81BD"/>
+        <a:srgbClr val="FF6A13"/>
       </a:accent1>
       <a:accent2>
         <a:srgbClr val="C0504D"/>
@@ -3117,12 +3217,12 @@
         <a:srgbClr val="800080"/>
       </a:folHlink>
     </a:clrScheme>
-    <a:fontScheme name="Office">
+    <a:fontScheme name="Workshop Type">
       <a:majorFont>
-        <a:latin typeface="Calibri"/>
-        <a:ea typeface=""/>
+        <a:latin typeface="Zen Kaku Gothic New"/>
+        <a:ea typeface="Zen Kaku Gothic New"/>
         <a:cs typeface=""/>
-        <a:font script="Jpan" typeface="ＭＳ Ｐゴシック"/>
+        <a:font script="Jpan" typeface="Zen Kaku Gothic New"/>
         <a:font script="Hang" typeface="맑은 고딕"/>
         <a:font script="Hans" typeface="宋体"/>
         <a:font script="Hant" typeface="新細明體"/>
@@ -3154,10 +3254,10 @@
         <a:font script="Geor" typeface="Sylfaen"/>
       </a:majorFont>
       <a:minorFont>
-        <a:latin typeface="Calibri"/>
-        <a:ea typeface=""/>
+        <a:latin typeface="Zen Kaku Gothic New"/>
+        <a:ea typeface="Zen Kaku Gothic New"/>
         <a:cs typeface=""/>
-        <a:font script="Jpan" typeface="ＭＳ Ｐゴシック"/>
+        <a:font script="Jpan" typeface="Zen Kaku Gothic New"/>
         <a:font script="Hang" typeface="맑은 고딕"/>
         <a:font script="Hans" typeface="宋体"/>
         <a:font script="Hant" typeface="新細明體"/>
